--- a/Lecture Slides/10 - Compilation Stages and Linking.pptx
+++ b/Lecture Slides/10 - Compilation Stages and Linking.pptx
@@ -147,7 +147,7 @@
           <a:p>
             <a:fld id="{B573B533-2B28-4146-967B-FFD3B2F9060E}" type="datetimeFigureOut">
               <a:rPr lang="en-US" smtClean="0"/>
-              <a:t>2/15/2026</a:t>
+              <a:t>2/16/2026</a:t>
             </a:fld>
             <a:endParaRPr lang="en-US"/>
           </a:p>
@@ -661,6 +661,33 @@
           <a:bodyPr/>
           <a:lstStyle/>
           <a:p>
+            <a:r>
+              <a:rPr lang="en-US" b="1" dirty="0"/>
+              <a:t>Figure 1:</a:t>
+            </a:r>
+          </a:p>
+          <a:p>
+            <a:r>
+              <a:rPr lang="en-US" dirty="0"/>
+              <a:t>A diagram of static linking where a linker combines application binary code and library binary code into a single executable.</a:t>
+            </a:r>
+          </a:p>
+          <a:p>
+            <a:endParaRPr lang="en-US" dirty="0"/>
+          </a:p>
+          <a:p>
+            <a:r>
+              <a:rPr lang="en-US" b="1" dirty="0"/>
+              <a:t>Figure 2:</a:t>
+            </a:r>
+          </a:p>
+          <a:p>
+            <a:r>
+              <a:rPr lang="en-US" dirty="0"/>
+              <a:t>A flow chart showing a linker merging two object files and libraries into a single, potentially large .exe file.</a:t>
+            </a:r>
+          </a:p>
+          <a:p>
             <a:endParaRPr lang="en-US" dirty="0"/>
           </a:p>
         </p:txBody>
@@ -747,6 +774,198 @@
           <a:p>
             <a:r>
               <a:rPr lang="en-US" b="1" dirty="0"/>
+              <a:t>Figure illustrates the drawback of static linking:</a:t>
+            </a:r>
+          </a:p>
+          <a:p>
+            <a:r>
+              <a:rPr lang="en-US" dirty="0"/>
+              <a:t>A four-step diagram explaining that static linking requires a full re-compilation of the executable if a library function is updated.</a:t>
+            </a:r>
+          </a:p>
+          <a:p>
+            <a:endParaRPr lang="en-US" dirty="0"/>
+          </a:p>
+        </p:txBody>
+      </p:sp>
+      <p:sp>
+        <p:nvSpPr>
+          <p:cNvPr id="4" name="Slide Number Placeholder 3"/>
+          <p:cNvSpPr>
+            <a:spLocks noGrp="1"/>
+          </p:cNvSpPr>
+          <p:nvPr>
+            <p:ph type="sldNum" sz="quarter" idx="5"/>
+          </p:nvPr>
+        </p:nvSpPr>
+        <p:spPr/>
+        <p:txBody>
+          <a:bodyPr/>
+          <a:lstStyle/>
+          <a:p>
+            <a:fld id="{85A168DF-9E89-434C-8420-43D1583ED296}" type="slidenum">
+              <a:rPr lang="en-US" smtClean="0"/>
+              <a:t>12</a:t>
+            </a:fld>
+            <a:endParaRPr lang="en-US"/>
+          </a:p>
+        </p:txBody>
+      </p:sp>
+    </p:spTree>
+    <p:extLst>
+      <p:ext uri="{BB962C8B-B14F-4D97-AF65-F5344CB8AC3E}">
+        <p14:creationId xmlns:p14="http://schemas.microsoft.com/office/powerpoint/2010/main" val="1963215890"/>
+      </p:ext>
+    </p:extLst>
+  </p:cSld>
+  <p:clrMapOvr>
+    <a:masterClrMapping/>
+  </p:clrMapOvr>
+</p:notes>
+</file>
+
+<file path=ppt/notesSlides/notesSlide13.xml><?xml version="1.0" encoding="utf-8"?>
+<p:notes xmlns:a="http://schemas.openxmlformats.org/drawingml/2006/main" xmlns:r="http://schemas.openxmlformats.org/officeDocument/2006/relationships" xmlns:p="http://schemas.openxmlformats.org/presentationml/2006/main">
+  <p:cSld>
+    <p:spTree>
+      <p:nvGrpSpPr>
+        <p:cNvPr id="1" name=""/>
+        <p:cNvGrpSpPr/>
+        <p:nvPr/>
+      </p:nvGrpSpPr>
+      <p:grpSpPr>
+        <a:xfrm>
+          <a:off x="0" y="0"/>
+          <a:ext cx="0" cy="0"/>
+          <a:chOff x="0" y="0"/>
+          <a:chExt cx="0" cy="0"/>
+        </a:xfrm>
+      </p:grpSpPr>
+      <p:sp>
+        <p:nvSpPr>
+          <p:cNvPr id="2" name="Slide Image Placeholder 1"/>
+          <p:cNvSpPr>
+            <a:spLocks noGrp="1" noRot="1" noChangeAspect="1"/>
+          </p:cNvSpPr>
+          <p:nvPr>
+            <p:ph type="sldImg"/>
+          </p:nvPr>
+        </p:nvSpPr>
+        <p:spPr/>
+      </p:sp>
+      <p:sp>
+        <p:nvSpPr>
+          <p:cNvPr id="3" name="Notes Placeholder 2"/>
+          <p:cNvSpPr>
+            <a:spLocks noGrp="1"/>
+          </p:cNvSpPr>
+          <p:nvPr>
+            <p:ph type="body" idx="1"/>
+          </p:nvPr>
+        </p:nvSpPr>
+        <p:spPr/>
+        <p:txBody>
+          <a:bodyPr/>
+          <a:lstStyle/>
+          <a:p>
+            <a:r>
+              <a:rPr lang="en-US" b="1" dirty="0"/>
+              <a:t>Figure description:</a:t>
+            </a:r>
+          </a:p>
+          <a:p>
+            <a:r>
+              <a:rPr lang="en-US" dirty="0"/>
+              <a:t>A diagram of dynamic linking where the linker places a memory address reference in the executable instead of the full library code.</a:t>
+            </a:r>
+          </a:p>
+          <a:p>
+            <a:endParaRPr lang="en-US" dirty="0"/>
+          </a:p>
+        </p:txBody>
+      </p:sp>
+      <p:sp>
+        <p:nvSpPr>
+          <p:cNvPr id="4" name="Slide Number Placeholder 3"/>
+          <p:cNvSpPr>
+            <a:spLocks noGrp="1"/>
+          </p:cNvSpPr>
+          <p:nvPr>
+            <p:ph type="sldNum" sz="quarter" idx="5"/>
+          </p:nvPr>
+        </p:nvSpPr>
+        <p:spPr/>
+        <p:txBody>
+          <a:bodyPr/>
+          <a:lstStyle/>
+          <a:p>
+            <a:fld id="{85A168DF-9E89-434C-8420-43D1583ED296}" type="slidenum">
+              <a:rPr lang="en-US" smtClean="0"/>
+              <a:t>13</a:t>
+            </a:fld>
+            <a:endParaRPr lang="en-US"/>
+          </a:p>
+        </p:txBody>
+      </p:sp>
+    </p:spTree>
+    <p:extLst>
+      <p:ext uri="{BB962C8B-B14F-4D97-AF65-F5344CB8AC3E}">
+        <p14:creationId xmlns:p14="http://schemas.microsoft.com/office/powerpoint/2010/main" val="3190007701"/>
+      </p:ext>
+    </p:extLst>
+  </p:cSld>
+  <p:clrMapOvr>
+    <a:masterClrMapping/>
+  </p:clrMapOvr>
+</p:notes>
+</file>
+
+<file path=ppt/notesSlides/notesSlide14.xml><?xml version="1.0" encoding="utf-8"?>
+<p:notes xmlns:a="http://schemas.openxmlformats.org/drawingml/2006/main" xmlns:r="http://schemas.openxmlformats.org/officeDocument/2006/relationships" xmlns:p="http://schemas.openxmlformats.org/presentationml/2006/main">
+  <p:cSld>
+    <p:spTree>
+      <p:nvGrpSpPr>
+        <p:cNvPr id="1" name=""/>
+        <p:cNvGrpSpPr/>
+        <p:nvPr/>
+      </p:nvGrpSpPr>
+      <p:grpSpPr>
+        <a:xfrm>
+          <a:off x="0" y="0"/>
+          <a:ext cx="0" cy="0"/>
+          <a:chOff x="0" y="0"/>
+          <a:chExt cx="0" cy="0"/>
+        </a:xfrm>
+      </p:grpSpPr>
+      <p:sp>
+        <p:nvSpPr>
+          <p:cNvPr id="2" name="Slide Image Placeholder 1"/>
+          <p:cNvSpPr>
+            <a:spLocks noGrp="1" noRot="1" noChangeAspect="1"/>
+          </p:cNvSpPr>
+          <p:nvPr>
+            <p:ph type="sldImg"/>
+          </p:nvPr>
+        </p:nvSpPr>
+        <p:spPr/>
+      </p:sp>
+      <p:sp>
+        <p:nvSpPr>
+          <p:cNvPr id="3" name="Notes Placeholder 2"/>
+          <p:cNvSpPr>
+            <a:spLocks noGrp="1"/>
+          </p:cNvSpPr>
+          <p:nvPr>
+            <p:ph type="body" idx="1"/>
+          </p:nvPr>
+        </p:nvSpPr>
+        <p:spPr/>
+        <p:txBody>
+          <a:bodyPr/>
+          <a:lstStyle/>
+          <a:p>
+            <a:r>
+              <a:rPr lang="en-US" b="1" dirty="0"/>
               <a:t>Dynamic Linking Benefits</a:t>
             </a:r>
             <a:r>
@@ -835,7 +1054,7 @@
 </p:notes>
 </file>
 
-<file path=ppt/notesSlides/notesSlide13.xml><?xml version="1.0" encoding="utf-8"?>
+<file path=ppt/notesSlides/notesSlide15.xml><?xml version="1.0" encoding="utf-8"?>
 <p:notes xmlns:a="http://schemas.openxmlformats.org/drawingml/2006/main" xmlns:r="http://schemas.openxmlformats.org/officeDocument/2006/relationships" xmlns:p="http://schemas.openxmlformats.org/presentationml/2006/main">
   <p:cSld>
     <p:spTree>
@@ -1058,273 +1277,6 @@
 </p:notes>
 </file>
 
-<file path=ppt/notesSlides/notesSlide14.xml><?xml version="1.0" encoding="utf-8"?>
-<p:notes xmlns:a="http://schemas.openxmlformats.org/drawingml/2006/main" xmlns:r="http://schemas.openxmlformats.org/officeDocument/2006/relationships" xmlns:p="http://schemas.openxmlformats.org/presentationml/2006/main">
-  <p:cSld>
-    <p:spTree>
-      <p:nvGrpSpPr>
-        <p:cNvPr id="1" name=""/>
-        <p:cNvGrpSpPr/>
-        <p:nvPr/>
-      </p:nvGrpSpPr>
-      <p:grpSpPr>
-        <a:xfrm>
-          <a:off x="0" y="0"/>
-          <a:ext cx="0" cy="0"/>
-          <a:chOff x="0" y="0"/>
-          <a:chExt cx="0" cy="0"/>
-        </a:xfrm>
-      </p:grpSpPr>
-      <p:sp>
-        <p:nvSpPr>
-          <p:cNvPr id="2" name="Slide Image Placeholder 1"/>
-          <p:cNvSpPr>
-            <a:spLocks noGrp="1" noRot="1" noChangeAspect="1"/>
-          </p:cNvSpPr>
-          <p:nvPr>
-            <p:ph type="sldImg"/>
-          </p:nvPr>
-        </p:nvSpPr>
-        <p:spPr/>
-      </p:sp>
-      <p:sp>
-        <p:nvSpPr>
-          <p:cNvPr id="3" name="Notes Placeholder 2"/>
-          <p:cNvSpPr>
-            <a:spLocks noGrp="1"/>
-          </p:cNvSpPr>
-          <p:nvPr>
-            <p:ph type="body" idx="1"/>
-          </p:nvPr>
-        </p:nvSpPr>
-        <p:spPr/>
-        <p:txBody>
-          <a:bodyPr/>
-          <a:lstStyle/>
-          <a:p>
-            <a:r>
-              <a:rPr lang="en-US" b="1" dirty="0"/>
-              <a:t>Creating the Shared Library</a:t>
-            </a:r>
-            <a:r>
-              <a:rPr lang="en-US" dirty="0"/>
-              <a:t>: </a:t>
-            </a:r>
-          </a:p>
-          <a:p>
-            <a:r>
-              <a:rPr lang="en-US" dirty="0"/>
-              <a:t>Details the command </a:t>
-            </a:r>
-            <a:r>
-              <a:rPr lang="en-US" sz="1200" kern="1200" dirty="0" err="1">
-                <a:solidFill>
-                  <a:schemeClr val="tx1"/>
-                </a:solidFill>
-                <a:latin typeface="+mn-lt"/>
-                <a:ea typeface="+mn-ea"/>
-                <a:cs typeface="+mn-cs"/>
-              </a:rPr>
-              <a:t>gcc</a:t>
-            </a:r>
-            <a:r>
-              <a:rPr lang="en-US" sz="1200" kern="1200" dirty="0">
-                <a:solidFill>
-                  <a:schemeClr val="tx1"/>
-                </a:solidFill>
-                <a:latin typeface="+mn-lt"/>
-                <a:ea typeface="+mn-ea"/>
-                <a:cs typeface="+mn-cs"/>
-              </a:rPr>
-              <a:t> -shared -</a:t>
-            </a:r>
-            <a:r>
-              <a:rPr lang="en-US" sz="1200" kern="1200" dirty="0" err="1">
-                <a:solidFill>
-                  <a:schemeClr val="tx1"/>
-                </a:solidFill>
-                <a:latin typeface="+mn-lt"/>
-                <a:ea typeface="+mn-ea"/>
-                <a:cs typeface="+mn-cs"/>
-              </a:rPr>
-              <a:t>fPIC</a:t>
-            </a:r>
-            <a:r>
-              <a:rPr lang="en-US" sz="1200" kern="1200" dirty="0">
-                <a:solidFill>
-                  <a:schemeClr val="tx1"/>
-                </a:solidFill>
-                <a:latin typeface="+mn-lt"/>
-                <a:ea typeface="+mn-ea"/>
-                <a:cs typeface="+mn-cs"/>
-              </a:rPr>
-              <a:t> -o libmath.so </a:t>
-            </a:r>
-            <a:r>
-              <a:rPr lang="en-US" sz="1200" kern="1200" dirty="0" err="1">
-                <a:solidFill>
-                  <a:schemeClr val="tx1"/>
-                </a:solidFill>
-                <a:latin typeface="+mn-lt"/>
-                <a:ea typeface="+mn-ea"/>
-                <a:cs typeface="+mn-cs"/>
-              </a:rPr>
-              <a:t>mathlib.c</a:t>
-            </a:r>
-            <a:endParaRPr lang="en-US" sz="1200" kern="1200" dirty="0">
-              <a:solidFill>
-                <a:schemeClr val="tx1"/>
-              </a:solidFill>
-              <a:latin typeface="+mn-lt"/>
-              <a:ea typeface="+mn-ea"/>
-              <a:cs typeface="+mn-cs"/>
-            </a:endParaRPr>
-          </a:p>
-          <a:p>
-            <a:endParaRPr lang="en-US" dirty="0"/>
-          </a:p>
-        </p:txBody>
-      </p:sp>
-      <p:sp>
-        <p:nvSpPr>
-          <p:cNvPr id="4" name="Slide Number Placeholder 3"/>
-          <p:cNvSpPr>
-            <a:spLocks noGrp="1"/>
-          </p:cNvSpPr>
-          <p:nvPr>
-            <p:ph type="sldNum" sz="quarter" idx="5"/>
-          </p:nvPr>
-        </p:nvSpPr>
-        <p:spPr/>
-        <p:txBody>
-          <a:bodyPr/>
-          <a:lstStyle/>
-          <a:p>
-            <a:fld id="{85A168DF-9E89-434C-8420-43D1583ED296}" type="slidenum">
-              <a:rPr lang="en-US" smtClean="0"/>
-              <a:t>16</a:t>
-            </a:fld>
-            <a:endParaRPr lang="en-US"/>
-          </a:p>
-        </p:txBody>
-      </p:sp>
-    </p:spTree>
-    <p:extLst>
-      <p:ext uri="{BB962C8B-B14F-4D97-AF65-F5344CB8AC3E}">
-        <p14:creationId xmlns:p14="http://schemas.microsoft.com/office/powerpoint/2010/main" val="3603881841"/>
-      </p:ext>
-    </p:extLst>
-  </p:cSld>
-  <p:clrMapOvr>
-    <a:masterClrMapping/>
-  </p:clrMapOvr>
-</p:notes>
-</file>
-
-<file path=ppt/notesSlides/notesSlide15.xml><?xml version="1.0" encoding="utf-8"?>
-<p:notes xmlns:a="http://schemas.openxmlformats.org/drawingml/2006/main" xmlns:r="http://schemas.openxmlformats.org/officeDocument/2006/relationships" xmlns:p="http://schemas.openxmlformats.org/presentationml/2006/main">
-  <p:cSld>
-    <p:spTree>
-      <p:nvGrpSpPr>
-        <p:cNvPr id="1" name=""/>
-        <p:cNvGrpSpPr/>
-        <p:nvPr/>
-      </p:nvGrpSpPr>
-      <p:grpSpPr>
-        <a:xfrm>
-          <a:off x="0" y="0"/>
-          <a:ext cx="0" cy="0"/>
-          <a:chOff x="0" y="0"/>
-          <a:chExt cx="0" cy="0"/>
-        </a:xfrm>
-      </p:grpSpPr>
-      <p:sp>
-        <p:nvSpPr>
-          <p:cNvPr id="2" name="Slide Image Placeholder 1"/>
-          <p:cNvSpPr>
-            <a:spLocks noGrp="1" noRot="1" noChangeAspect="1"/>
-          </p:cNvSpPr>
-          <p:nvPr>
-            <p:ph type="sldImg"/>
-          </p:nvPr>
-        </p:nvSpPr>
-        <p:spPr/>
-      </p:sp>
-      <p:sp>
-        <p:nvSpPr>
-          <p:cNvPr id="3" name="Notes Placeholder 2"/>
-          <p:cNvSpPr>
-            <a:spLocks noGrp="1"/>
-          </p:cNvSpPr>
-          <p:nvPr>
-            <p:ph type="body" idx="1"/>
-          </p:nvPr>
-        </p:nvSpPr>
-        <p:spPr/>
-        <p:txBody>
-          <a:bodyPr/>
-          <a:lstStyle/>
-          <a:p>
-            <a:r>
-              <a:rPr lang="en-US" b="1" dirty="0"/>
-              <a:t>Importance of -</a:t>
-            </a:r>
-            <a:r>
-              <a:rPr lang="en-US" b="1" dirty="0" err="1"/>
-              <a:t>fPIC</a:t>
-            </a:r>
-            <a:r>
-              <a:rPr lang="en-US" dirty="0"/>
-              <a:t>: </a:t>
-            </a:r>
-          </a:p>
-          <a:p>
-            <a:r>
-              <a:rPr lang="en-US" dirty="0"/>
-              <a:t>Explains that Position Independent Code (PIC) is necessary because shared libraries are loaded at non-fixed memory addresses.</a:t>
-            </a:r>
-          </a:p>
-          <a:p>
-            <a:endParaRPr lang="en-US" dirty="0"/>
-          </a:p>
-        </p:txBody>
-      </p:sp>
-      <p:sp>
-        <p:nvSpPr>
-          <p:cNvPr id="4" name="Slide Number Placeholder 3"/>
-          <p:cNvSpPr>
-            <a:spLocks noGrp="1"/>
-          </p:cNvSpPr>
-          <p:nvPr>
-            <p:ph type="sldNum" sz="quarter" idx="5"/>
-          </p:nvPr>
-        </p:nvSpPr>
-        <p:spPr/>
-        <p:txBody>
-          <a:bodyPr/>
-          <a:lstStyle/>
-          <a:p>
-            <a:fld id="{85A168DF-9E89-434C-8420-43D1583ED296}" type="slidenum">
-              <a:rPr lang="en-US" smtClean="0"/>
-              <a:t>17</a:t>
-            </a:fld>
-            <a:endParaRPr lang="en-US"/>
-          </a:p>
-        </p:txBody>
-      </p:sp>
-    </p:spTree>
-    <p:extLst>
-      <p:ext uri="{BB962C8B-B14F-4D97-AF65-F5344CB8AC3E}">
-        <p14:creationId xmlns:p14="http://schemas.microsoft.com/office/powerpoint/2010/main" val="3955282535"/>
-      </p:ext>
-    </p:extLst>
-  </p:cSld>
-  <p:clrMapOvr>
-    <a:masterClrMapping/>
-  </p:clrMapOvr>
-</p:notes>
-</file>
-
 <file path=ppt/notesSlides/notesSlide16.xml><?xml version="1.0" encoding="utf-8"?>
 <p:notes xmlns:a="http://schemas.openxmlformats.org/drawingml/2006/main" xmlns:r="http://schemas.openxmlformats.org/officeDocument/2006/relationships" xmlns:p="http://schemas.openxmlformats.org/presentationml/2006/main">
   <p:cSld>
@@ -1371,15 +1323,7 @@
           <a:p>
             <a:r>
               <a:rPr lang="en-US" b="1" dirty="0"/>
-              <a:t>How -</a:t>
-            </a:r>
-            <a:r>
-              <a:rPr lang="en-US" b="1" dirty="0" err="1"/>
-              <a:t>fPIC</a:t>
-            </a:r>
-            <a:r>
-              <a:rPr lang="en-US" b="1" dirty="0"/>
-              <a:t> Works</a:t>
+              <a:t>Creating the Shared Library</a:t>
             </a:r>
             <a:r>
               <a:rPr lang="en-US" dirty="0"/>
@@ -1389,8 +1333,71 @@
           <a:p>
             <a:r>
               <a:rPr lang="en-US" dirty="0"/>
-              <a:t>Explains the use of a Global Offset Table (GOT) to access symbols relative to a base register at runtime.</a:t>
-            </a:r>
+              <a:t>Details the command </a:t>
+            </a:r>
+            <a:r>
+              <a:rPr lang="en-US" sz="1200" kern="1200" dirty="0" err="1">
+                <a:solidFill>
+                  <a:schemeClr val="tx1"/>
+                </a:solidFill>
+                <a:latin typeface="+mn-lt"/>
+                <a:ea typeface="+mn-ea"/>
+                <a:cs typeface="+mn-cs"/>
+              </a:rPr>
+              <a:t>gcc</a:t>
+            </a:r>
+            <a:r>
+              <a:rPr lang="en-US" sz="1200" kern="1200" dirty="0">
+                <a:solidFill>
+                  <a:schemeClr val="tx1"/>
+                </a:solidFill>
+                <a:latin typeface="+mn-lt"/>
+                <a:ea typeface="+mn-ea"/>
+                <a:cs typeface="+mn-cs"/>
+              </a:rPr>
+              <a:t> -shared -</a:t>
+            </a:r>
+            <a:r>
+              <a:rPr lang="en-US" sz="1200" kern="1200" dirty="0" err="1">
+                <a:solidFill>
+                  <a:schemeClr val="tx1"/>
+                </a:solidFill>
+                <a:latin typeface="+mn-lt"/>
+                <a:ea typeface="+mn-ea"/>
+                <a:cs typeface="+mn-cs"/>
+              </a:rPr>
+              <a:t>fPIC</a:t>
+            </a:r>
+            <a:r>
+              <a:rPr lang="en-US" sz="1200" kern="1200" dirty="0">
+                <a:solidFill>
+                  <a:schemeClr val="tx1"/>
+                </a:solidFill>
+                <a:latin typeface="+mn-lt"/>
+                <a:ea typeface="+mn-ea"/>
+                <a:cs typeface="+mn-cs"/>
+              </a:rPr>
+              <a:t> -o libmath.so </a:t>
+            </a:r>
+            <a:r>
+              <a:rPr lang="en-US" sz="1200" kern="1200" dirty="0" err="1">
+                <a:solidFill>
+                  <a:schemeClr val="tx1"/>
+                </a:solidFill>
+                <a:latin typeface="+mn-lt"/>
+                <a:ea typeface="+mn-ea"/>
+                <a:cs typeface="+mn-cs"/>
+              </a:rPr>
+              <a:t>mathlib.c</a:t>
+            </a:r>
+            <a:endParaRPr lang="en-US" sz="1200" kern="1200" dirty="0">
+              <a:solidFill>
+                <a:schemeClr val="tx1"/>
+              </a:solidFill>
+              <a:latin typeface="+mn-lt"/>
+              <a:ea typeface="+mn-ea"/>
+              <a:cs typeface="+mn-cs"/>
+            </a:endParaRPr>
           </a:p>
           <a:p>
             <a:endParaRPr lang="en-US" dirty="0"/>
@@ -1414,7 +1421,7 @@
           <a:p>
             <a:fld id="{85A168DF-9E89-434C-8420-43D1583ED296}" type="slidenum">
               <a:rPr lang="en-US" smtClean="0"/>
-              <a:t>18</a:t>
+              <a:t>16</a:t>
             </a:fld>
             <a:endParaRPr lang="en-US"/>
           </a:p>
@@ -1423,7 +1430,7 @@
     </p:spTree>
     <p:extLst>
       <p:ext uri="{BB962C8B-B14F-4D97-AF65-F5344CB8AC3E}">
-        <p14:creationId xmlns:p14="http://schemas.microsoft.com/office/powerpoint/2010/main" val="409152124"/>
+        <p14:creationId xmlns:p14="http://schemas.microsoft.com/office/powerpoint/2010/main" val="3603881841"/>
       </p:ext>
     </p:extLst>
   </p:cSld>
@@ -1479,38 +1486,21 @@
           <a:p>
             <a:r>
               <a:rPr lang="en-US" b="1" dirty="0"/>
-              <a:t>Step 2:</a:t>
+              <a:t>Importance of -</a:t>
+            </a:r>
+            <a:r>
+              <a:rPr lang="en-US" b="1" dirty="0" err="1"/>
+              <a:t>fPIC</a:t>
+            </a:r>
+            <a:r>
+              <a:rPr lang="en-US" dirty="0"/>
+              <a:t>: </a:t>
             </a:r>
           </a:p>
           <a:p>
             <a:r>
-              <a:rPr lang="en-US" b="1" dirty="0"/>
-              <a:t>Using the Shared Library</a:t>
-            </a:r>
-            <a:r>
               <a:rPr lang="en-US" dirty="0"/>
-              <a:t>: </a:t>
-            </a:r>
-          </a:p>
-          <a:p>
-            <a:r>
-              <a:rPr lang="en-US" dirty="0"/>
-              <a:t>Shows the </a:t>
-            </a:r>
-            <a:r>
-              <a:rPr lang="en-US" sz="1200" kern="1200" dirty="0" err="1">
-                <a:solidFill>
-                  <a:schemeClr val="tx1"/>
-                </a:solidFill>
-                <a:latin typeface="+mn-lt"/>
-                <a:ea typeface="+mn-ea"/>
-                <a:cs typeface="+mn-cs"/>
-              </a:rPr>
-              <a:t>main.c</a:t>
-            </a:r>
-            <a:r>
-              <a:rPr lang="en-US" dirty="0"/>
-              <a:t> code declaring the library functions for use in the main program.</a:t>
+              <a:t>Explains that Position Independent Code (PIC) is necessary because shared libraries are loaded at non-fixed memory addresses.</a:t>
             </a:r>
           </a:p>
           <a:p>
@@ -1535,7 +1525,7 @@
           <a:p>
             <a:fld id="{85A168DF-9E89-434C-8420-43D1583ED296}" type="slidenum">
               <a:rPr lang="en-US" smtClean="0"/>
-              <a:t>19</a:t>
+              <a:t>17</a:t>
             </a:fld>
             <a:endParaRPr lang="en-US"/>
           </a:p>
@@ -1544,7 +1534,7 @@
     </p:spTree>
     <p:extLst>
       <p:ext uri="{BB962C8B-B14F-4D97-AF65-F5344CB8AC3E}">
-        <p14:creationId xmlns:p14="http://schemas.microsoft.com/office/powerpoint/2010/main" val="2235310087"/>
+        <p14:creationId xmlns:p14="http://schemas.microsoft.com/office/powerpoint/2010/main" val="3955282535"/>
       </p:ext>
     </p:extLst>
   </p:cSld>
@@ -1600,191 +1590,25 @@
           <a:p>
             <a:r>
               <a:rPr lang="en-US" b="1" dirty="0"/>
-              <a:t>Step 3:</a:t>
+              <a:t>How -</a:t>
+            </a:r>
+            <a:r>
+              <a:rPr lang="en-US" b="1" dirty="0" err="1"/>
+              <a:t>fPIC</a:t>
+            </a:r>
+            <a:r>
+              <a:rPr lang="en-US" b="1" dirty="0"/>
+              <a:t> Works</a:t>
+            </a:r>
+            <a:r>
+              <a:rPr lang="en-US" dirty="0"/>
+              <a:t>: </a:t>
             </a:r>
           </a:p>
           <a:p>
             <a:r>
-              <a:rPr lang="en-US" b="1" dirty="0"/>
-              <a:t>Linking the Shared Library</a:t>
-            </a:r>
-            <a:r>
               <a:rPr lang="en-US" dirty="0"/>
-              <a:t>: </a:t>
-            </a:r>
-          </a:p>
-          <a:p>
-            <a:r>
-              <a:rPr lang="en-US" dirty="0"/>
-              <a:t>Demonstrates the command </a:t>
-            </a:r>
-            <a:r>
-              <a:rPr lang="en-US" sz="1200" kern="1200" dirty="0" err="1">
-                <a:solidFill>
-                  <a:schemeClr val="tx1"/>
-                </a:solidFill>
-                <a:latin typeface="+mn-lt"/>
-                <a:ea typeface="+mn-ea"/>
-                <a:cs typeface="+mn-cs"/>
-              </a:rPr>
-              <a:t>gcc</a:t>
-            </a:r>
-            <a:r>
-              <a:rPr lang="en-US" sz="1200" kern="1200" dirty="0">
-                <a:solidFill>
-                  <a:schemeClr val="tx1"/>
-                </a:solidFill>
-                <a:latin typeface="+mn-lt"/>
-                <a:ea typeface="+mn-ea"/>
-                <a:cs typeface="+mn-cs"/>
-              </a:rPr>
-              <a:t> </a:t>
-            </a:r>
-            <a:r>
-              <a:rPr lang="en-US" sz="1200" kern="1200" dirty="0" err="1">
-                <a:solidFill>
-                  <a:schemeClr val="tx1"/>
-                </a:solidFill>
-                <a:latin typeface="+mn-lt"/>
-                <a:ea typeface="+mn-ea"/>
-                <a:cs typeface="+mn-cs"/>
-              </a:rPr>
-              <a:t>main.c</a:t>
-            </a:r>
-            <a:r>
-              <a:rPr lang="en-US" sz="1200" kern="1200" dirty="0">
-                <a:solidFill>
-                  <a:schemeClr val="tx1"/>
-                </a:solidFill>
-                <a:latin typeface="+mn-lt"/>
-                <a:ea typeface="+mn-ea"/>
-                <a:cs typeface="+mn-cs"/>
-              </a:rPr>
-              <a:t> -L. -</a:t>
-            </a:r>
-            <a:r>
-              <a:rPr lang="en-US" sz="1200" kern="1200" dirty="0" err="1">
-                <a:solidFill>
-                  <a:schemeClr val="tx1"/>
-                </a:solidFill>
-                <a:latin typeface="+mn-lt"/>
-                <a:ea typeface="+mn-ea"/>
-                <a:cs typeface="+mn-cs"/>
-              </a:rPr>
-              <a:t>lmath</a:t>
-            </a:r>
-            <a:r>
-              <a:rPr lang="en-US" sz="1200" kern="1200" dirty="0">
-                <a:solidFill>
-                  <a:schemeClr val="tx1"/>
-                </a:solidFill>
-                <a:latin typeface="+mn-lt"/>
-                <a:ea typeface="+mn-ea"/>
-                <a:cs typeface="+mn-cs"/>
-              </a:rPr>
-              <a:t> -o program</a:t>
-            </a:r>
-            <a:r>
-              <a:rPr lang="en-US" dirty="0"/>
-              <a:t>.</a:t>
-            </a:r>
-          </a:p>
-          <a:p>
-            <a:pPr marL="171450" indent="-171450">
-              <a:buFont typeface="Arial" panose="020B0604020202020204" pitchFamily="34" charset="0"/>
-              <a:buChar char="•"/>
-            </a:pPr>
-            <a:r>
-              <a:rPr lang="en-US" sz="1200" kern="1200" dirty="0">
-                <a:solidFill>
-                  <a:schemeClr val="tx1"/>
-                </a:solidFill>
-                <a:latin typeface="+mn-lt"/>
-                <a:ea typeface="+mn-ea"/>
-                <a:cs typeface="+mn-cs"/>
-              </a:rPr>
-              <a:t>-L.</a:t>
-            </a:r>
-            <a:r>
-              <a:rPr lang="en-US" dirty="0"/>
-              <a:t>: Look in the current directory for libraries.</a:t>
-            </a:r>
-          </a:p>
-          <a:p>
-            <a:pPr marL="171450" indent="-171450">
-              <a:buFont typeface="Arial" panose="020B0604020202020204" pitchFamily="34" charset="0"/>
-              <a:buChar char="•"/>
-            </a:pPr>
-            <a:r>
-              <a:rPr lang="en-US" sz="1200" kern="1200" dirty="0">
-                <a:solidFill>
-                  <a:schemeClr val="tx1"/>
-                </a:solidFill>
-                <a:latin typeface="+mn-lt"/>
-                <a:ea typeface="+mn-ea"/>
-                <a:cs typeface="+mn-cs"/>
-              </a:rPr>
-              <a:t>-</a:t>
-            </a:r>
-            <a:r>
-              <a:rPr lang="en-US" sz="1200" kern="1200" dirty="0" err="1">
-                <a:solidFill>
-                  <a:schemeClr val="tx1"/>
-                </a:solidFill>
-                <a:latin typeface="+mn-lt"/>
-                <a:ea typeface="+mn-ea"/>
-                <a:cs typeface="+mn-cs"/>
-              </a:rPr>
-              <a:t>lmath</a:t>
-            </a:r>
-            <a:r>
-              <a:rPr lang="en-US" dirty="0"/>
-              <a:t>: Link against </a:t>
-            </a:r>
-            <a:r>
-              <a:rPr lang="en-US" sz="1200" kern="1200" dirty="0">
-                <a:solidFill>
-                  <a:schemeClr val="tx1"/>
-                </a:solidFill>
-                <a:latin typeface="+mn-lt"/>
-                <a:ea typeface="+mn-ea"/>
-                <a:cs typeface="+mn-cs"/>
-              </a:rPr>
-              <a:t>libmath.so</a:t>
-            </a:r>
-            <a:r>
-              <a:rPr lang="en-US" dirty="0"/>
-              <a:t> (the </a:t>
-            </a:r>
-            <a:r>
-              <a:rPr lang="en-US" sz="1200" kern="1200" dirty="0">
-                <a:solidFill>
-                  <a:schemeClr val="tx1"/>
-                </a:solidFill>
-                <a:latin typeface="+mn-lt"/>
-                <a:ea typeface="+mn-ea"/>
-                <a:cs typeface="+mn-cs"/>
-              </a:rPr>
-              <a:t>lib</a:t>
-            </a:r>
-            <a:r>
-              <a:rPr lang="en-US" dirty="0"/>
-              <a:t> prefix and </a:t>
-            </a:r>
-            <a:r>
-              <a:rPr lang="en-US" sz="1200" kern="1200" dirty="0">
-                <a:solidFill>
-                  <a:schemeClr val="tx1"/>
-                </a:solidFill>
-                <a:latin typeface="+mn-lt"/>
-                <a:ea typeface="+mn-ea"/>
-                <a:cs typeface="+mn-cs"/>
-              </a:rPr>
-              <a:t>.so</a:t>
-            </a:r>
-            <a:r>
-              <a:rPr lang="en-US" dirty="0"/>
-              <a:t> suffix are assumed).</a:t>
+              <a:t>Explains the use of a Global Offset Table (GOT) to access symbols relative to a base register at runtime.</a:t>
             </a:r>
           </a:p>
           <a:p>
@@ -1809,7 +1633,7 @@
           <a:p>
             <a:fld id="{85A168DF-9E89-434C-8420-43D1583ED296}" type="slidenum">
               <a:rPr lang="en-US" smtClean="0"/>
-              <a:t>20</a:t>
+              <a:t>18</a:t>
             </a:fld>
             <a:endParaRPr lang="en-US"/>
           </a:p>
@@ -1818,7 +1642,7 @@
     </p:spTree>
     <p:extLst>
       <p:ext uri="{BB962C8B-B14F-4D97-AF65-F5344CB8AC3E}">
-        <p14:creationId xmlns:p14="http://schemas.microsoft.com/office/powerpoint/2010/main" val="814308340"/>
+        <p14:creationId xmlns:p14="http://schemas.microsoft.com/office/powerpoint/2010/main" val="409152124"/>
       </p:ext>
     </p:extLst>
   </p:cSld>
@@ -1873,7 +1697,27 @@
           <a:lstStyle/>
           <a:p>
             <a:r>
-              <a:rPr lang="en-US" sz="1200" b="1" kern="1200" dirty="0" err="1">
+              <a:rPr lang="en-US" b="1" dirty="0"/>
+              <a:t>Step 2:</a:t>
+            </a:r>
+          </a:p>
+          <a:p>
+            <a:r>
+              <a:rPr lang="en-US" b="1" dirty="0"/>
+              <a:t>Using the Shared Library</a:t>
+            </a:r>
+            <a:r>
+              <a:rPr lang="en-US" dirty="0"/>
+              <a:t>: </a:t>
+            </a:r>
+          </a:p>
+          <a:p>
+            <a:r>
+              <a:rPr lang="en-US" dirty="0"/>
+              <a:t>Shows the </a:t>
+            </a:r>
+            <a:r>
+              <a:rPr lang="en-US" sz="1200" kern="1200" dirty="0" err="1">
                 <a:solidFill>
                   <a:schemeClr val="tx1"/>
                 </a:solidFill>
@@ -1881,241 +1725,11 @@
                 <a:ea typeface="+mn-ea"/>
                 <a:cs typeface="+mn-cs"/>
               </a:rPr>
-              <a:t>dlopen</a:t>
-            </a:r>
-            <a:r>
-              <a:rPr lang="en-US" sz="1200" b="1" kern="1200" dirty="0">
-                <a:solidFill>
-                  <a:schemeClr val="tx1"/>
-                </a:solidFill>
-                <a:latin typeface="+mn-lt"/>
-                <a:ea typeface="+mn-ea"/>
-                <a:cs typeface="+mn-cs"/>
-              </a:rPr>
-              <a:t>()</a:t>
+              <a:t>main.c</a:t>
             </a:r>
             <a:r>
               <a:rPr lang="en-US" dirty="0"/>
-              <a:t>: </a:t>
-            </a:r>
-          </a:p>
-          <a:p>
-            <a:r>
-              <a:rPr lang="en-US" dirty="0"/>
-              <a:t>The function used to load a library. It takes a path to a </a:t>
-            </a:r>
-            <a:r>
-              <a:rPr lang="en-US" sz="1200" kern="1200" dirty="0">
-                <a:solidFill>
-                  <a:schemeClr val="tx1"/>
-                </a:solidFill>
-                <a:latin typeface="+mn-lt"/>
-                <a:ea typeface="+mn-ea"/>
-                <a:cs typeface="+mn-cs"/>
-              </a:rPr>
-              <a:t>.so</a:t>
-            </a:r>
-            <a:r>
-              <a:rPr lang="en-US" dirty="0"/>
-              <a:t> file and returns a "handle" (a pointer) to that library.</a:t>
-            </a:r>
-          </a:p>
-          <a:p>
-            <a:endParaRPr lang="en-US" dirty="0"/>
-          </a:p>
-          <a:p>
-            <a:r>
-              <a:rPr lang="en-US" sz="1200" b="1" kern="1200" dirty="0" err="1">
-                <a:solidFill>
-                  <a:schemeClr val="tx1"/>
-                </a:solidFill>
-                <a:latin typeface="+mn-lt"/>
-                <a:ea typeface="+mn-ea"/>
-                <a:cs typeface="+mn-cs"/>
-              </a:rPr>
-              <a:t>dlsym</a:t>
-            </a:r>
-            <a:r>
-              <a:rPr lang="en-US" sz="1200" b="1" kern="1200" dirty="0">
-                <a:solidFill>
-                  <a:schemeClr val="tx1"/>
-                </a:solidFill>
-                <a:latin typeface="+mn-lt"/>
-                <a:ea typeface="+mn-ea"/>
-                <a:cs typeface="+mn-cs"/>
-              </a:rPr>
-              <a:t>()</a:t>
-            </a:r>
-            <a:r>
-              <a:rPr lang="en-US" dirty="0"/>
-              <a:t>: </a:t>
-            </a:r>
-          </a:p>
-          <a:p>
-            <a:r>
-              <a:rPr lang="en-US" dirty="0"/>
-              <a:t>The function used to find a specific symbol (like a function name) inside the loaded library. It returns a function pointer that your code can call.</a:t>
-            </a:r>
-          </a:p>
-          <a:p>
-            <a:endParaRPr lang="en-US" dirty="0"/>
-          </a:p>
-          <a:p>
-            <a:r>
-              <a:rPr lang="en-US" sz="1200" b="1" kern="1200" dirty="0" err="1">
-                <a:solidFill>
-                  <a:schemeClr val="tx1"/>
-                </a:solidFill>
-                <a:latin typeface="+mn-lt"/>
-                <a:ea typeface="+mn-ea"/>
-                <a:cs typeface="+mn-cs"/>
-              </a:rPr>
-              <a:t>dlerror</a:t>
-            </a:r>
-            <a:r>
-              <a:rPr lang="en-US" sz="1200" b="1" kern="1200" dirty="0">
-                <a:solidFill>
-                  <a:schemeClr val="tx1"/>
-                </a:solidFill>
-                <a:latin typeface="+mn-lt"/>
-                <a:ea typeface="+mn-ea"/>
-                <a:cs typeface="+mn-cs"/>
-              </a:rPr>
-              <a:t>()</a:t>
-            </a:r>
-            <a:r>
-              <a:rPr lang="en-US" b="1" dirty="0"/>
-              <a:t> and </a:t>
-            </a:r>
-            <a:r>
-              <a:rPr lang="en-US" sz="1200" b="1" kern="1200" dirty="0" err="1">
-                <a:solidFill>
-                  <a:schemeClr val="tx1"/>
-                </a:solidFill>
-                <a:latin typeface="+mn-lt"/>
-                <a:ea typeface="+mn-ea"/>
-                <a:cs typeface="+mn-cs"/>
-              </a:rPr>
-              <a:t>dlclose</a:t>
-            </a:r>
-            <a:r>
-              <a:rPr lang="en-US" sz="1200" b="1" kern="1200" dirty="0">
-                <a:solidFill>
-                  <a:schemeClr val="tx1"/>
-                </a:solidFill>
-                <a:latin typeface="+mn-lt"/>
-                <a:ea typeface="+mn-ea"/>
-                <a:cs typeface="+mn-cs"/>
-              </a:rPr>
-              <a:t>()</a:t>
-            </a:r>
-            <a:r>
-              <a:rPr lang="en-US" dirty="0"/>
-              <a:t>: </a:t>
-            </a:r>
-          </a:p>
-          <a:p>
-            <a:r>
-              <a:rPr lang="en-US" sz="1200" kern="1200" dirty="0" err="1">
-                <a:solidFill>
-                  <a:schemeClr val="tx1"/>
-                </a:solidFill>
-                <a:latin typeface="+mn-lt"/>
-                <a:ea typeface="+mn-ea"/>
-                <a:cs typeface="+mn-cs"/>
-              </a:rPr>
-              <a:t>dlerror</a:t>
-            </a:r>
-            <a:r>
-              <a:rPr lang="en-US" sz="1200" kern="1200" dirty="0">
-                <a:solidFill>
-                  <a:schemeClr val="tx1"/>
-                </a:solidFill>
-                <a:latin typeface="+mn-lt"/>
-                <a:ea typeface="+mn-ea"/>
-                <a:cs typeface="+mn-cs"/>
-              </a:rPr>
-              <a:t>()</a:t>
-            </a:r>
-            <a:r>
-              <a:rPr lang="en-US" dirty="0"/>
-              <a:t> provides a human-readable string explaining why a load failed; </a:t>
-            </a:r>
-            <a:r>
-              <a:rPr lang="en-US" sz="1200" kern="1200" dirty="0" err="1">
-                <a:solidFill>
-                  <a:schemeClr val="tx1"/>
-                </a:solidFill>
-                <a:latin typeface="+mn-lt"/>
-                <a:ea typeface="+mn-ea"/>
-                <a:cs typeface="+mn-cs"/>
-              </a:rPr>
-              <a:t>dlclose</a:t>
-            </a:r>
-            <a:r>
-              <a:rPr lang="en-US" sz="1200" kern="1200" dirty="0">
-                <a:solidFill>
-                  <a:schemeClr val="tx1"/>
-                </a:solidFill>
-                <a:latin typeface="+mn-lt"/>
-                <a:ea typeface="+mn-ea"/>
-                <a:cs typeface="+mn-cs"/>
-              </a:rPr>
-              <a:t>()</a:t>
-            </a:r>
-            <a:r>
-              <a:rPr lang="en-US" dirty="0"/>
-              <a:t> unloads the library to free up memory.</a:t>
-            </a:r>
-          </a:p>
-          <a:p>
-            <a:pPr marL="0" marR="0" lvl="0" indent="0" algn="l" defTabSz="914400" rtl="0" eaLnBrk="1" fontAlgn="auto" latinLnBrk="0" hangingPunct="1">
-              <a:lnSpc>
-                <a:spcPct val="100000"/>
-              </a:lnSpc>
-              <a:spcBef>
-                <a:spcPts val="0"/>
-              </a:spcBef>
-              <a:spcAft>
-                <a:spcPts val="0"/>
-              </a:spcAft>
-              <a:buClrTx/>
-              <a:buSzTx/>
-              <a:buFontTx/>
-              <a:buNone/>
-              <a:tabLst/>
-              <a:defRPr/>
-            </a:pPr>
-            <a:endParaRPr lang="en-US" u="sng" dirty="0"/>
-          </a:p>
-          <a:p>
-            <a:pPr marL="0" marR="0" lvl="0" indent="0" algn="l" defTabSz="914400" rtl="0" eaLnBrk="1" fontAlgn="auto" latinLnBrk="0" hangingPunct="1">
-              <a:lnSpc>
-                <a:spcPct val="100000"/>
-              </a:lnSpc>
-              <a:spcBef>
-                <a:spcPts val="0"/>
-              </a:spcBef>
-              <a:spcAft>
-                <a:spcPts val="0"/>
-              </a:spcAft>
-              <a:buClrTx/>
-              <a:buSzTx/>
-              <a:buFontTx/>
-              <a:buNone/>
-              <a:tabLst/>
-              <a:defRPr/>
-            </a:pPr>
-            <a:r>
-              <a:rPr lang="en-US" b="1" u="sng" dirty="0"/>
-              <a:t>See example:</a:t>
-            </a:r>
-            <a:br>
-              <a:rPr lang="en-US" b="1" u="sng" dirty="0"/>
-            </a:br>
-            <a:r>
-              <a:rPr lang="en-US" dirty="0"/>
-              <a:t>Manual Runtime Link directory</a:t>
+              <a:t> code declaring the library functions for use in the main program.</a:t>
             </a:r>
           </a:p>
           <a:p>
@@ -2140,7 +1754,7 @@
           <a:p>
             <a:fld id="{85A168DF-9E89-434C-8420-43D1583ED296}" type="slidenum">
               <a:rPr lang="en-US" smtClean="0"/>
-              <a:t>23</a:t>
+              <a:t>19</a:t>
             </a:fld>
             <a:endParaRPr lang="en-US"/>
           </a:p>
@@ -2149,7 +1763,7 @@
     </p:spTree>
     <p:extLst>
       <p:ext uri="{BB962C8B-B14F-4D97-AF65-F5344CB8AC3E}">
-        <p14:creationId xmlns:p14="http://schemas.microsoft.com/office/powerpoint/2010/main" val="1616791146"/>
+        <p14:creationId xmlns:p14="http://schemas.microsoft.com/office/powerpoint/2010/main" val="2235310087"/>
       </p:ext>
     </p:extLst>
   </p:cSld>
@@ -2349,15 +1963,13 @@
           <a:p>
             <a:r>
               <a:rPr lang="en-US" b="1" dirty="0"/>
-              <a:t>Example Code (</a:t>
-            </a:r>
-            <a:r>
-              <a:rPr lang="en-US" b="1" dirty="0" err="1"/>
-              <a:t>dlopen</a:t>
-            </a:r>
+              <a:t>Step 3:</a:t>
+            </a:r>
+          </a:p>
+          <a:p>
             <a:r>
               <a:rPr lang="en-US" b="1" dirty="0"/>
-              <a:t>)</a:t>
+              <a:t>Linking the Shared Library</a:t>
             </a:r>
             <a:r>
               <a:rPr lang="en-US" dirty="0"/>
@@ -2367,10 +1979,10 @@
           <a:p>
             <a:r>
               <a:rPr lang="en-US" dirty="0"/>
-              <a:t>A code snippet showing the full workflow: loading </a:t>
-            </a:r>
-            <a:r>
-              <a:rPr lang="en-US" sz="1200" kern="1200" dirty="0">
+              <a:t>Demonstrates the command </a:t>
+            </a:r>
+            <a:r>
+              <a:rPr lang="en-US" sz="1200" kern="1200" dirty="0" err="1">
                 <a:solidFill>
                   <a:schemeClr val="tx1"/>
                 </a:solidFill>
@@ -2378,11 +1990,7 @@
                 <a:ea typeface="+mn-ea"/>
                 <a:cs typeface="+mn-cs"/>
               </a:rPr>
-              <a:t>libmath.so</a:t>
-            </a:r>
-            <a:r>
-              <a:rPr lang="en-US" dirty="0"/>
-              <a:t>, finding the </a:t>
+              <a:t>gcc</a:t>
             </a:r>
             <a:r>
               <a:rPr lang="en-US" sz="1200" kern="1200" dirty="0">
@@ -2393,11 +2001,436 @@
                 <a:ea typeface="+mn-ea"/>
                 <a:cs typeface="+mn-cs"/>
               </a:rPr>
-              <a:t>add</a:t>
+              <a:t> </a:t>
+            </a:r>
+            <a:r>
+              <a:rPr lang="en-US" sz="1200" kern="1200" dirty="0" err="1">
+                <a:solidFill>
+                  <a:schemeClr val="tx1"/>
+                </a:solidFill>
+                <a:latin typeface="+mn-lt"/>
+                <a:ea typeface="+mn-ea"/>
+                <a:cs typeface="+mn-cs"/>
+              </a:rPr>
+              <a:t>main.c</a:t>
+            </a:r>
+            <a:r>
+              <a:rPr lang="en-US" sz="1200" kern="1200" dirty="0">
+                <a:solidFill>
+                  <a:schemeClr val="tx1"/>
+                </a:solidFill>
+                <a:latin typeface="+mn-lt"/>
+                <a:ea typeface="+mn-ea"/>
+                <a:cs typeface="+mn-cs"/>
+              </a:rPr>
+              <a:t> -L. -</a:t>
+            </a:r>
+            <a:r>
+              <a:rPr lang="en-US" sz="1200" kern="1200" dirty="0" err="1">
+                <a:solidFill>
+                  <a:schemeClr val="tx1"/>
+                </a:solidFill>
+                <a:latin typeface="+mn-lt"/>
+                <a:ea typeface="+mn-ea"/>
+                <a:cs typeface="+mn-cs"/>
+              </a:rPr>
+              <a:t>lmath</a:t>
+            </a:r>
+            <a:r>
+              <a:rPr lang="en-US" sz="1200" kern="1200" dirty="0">
+                <a:solidFill>
+                  <a:schemeClr val="tx1"/>
+                </a:solidFill>
+                <a:latin typeface="+mn-lt"/>
+                <a:ea typeface="+mn-ea"/>
+                <a:cs typeface="+mn-cs"/>
+              </a:rPr>
+              <a:t> -o program</a:t>
             </a:r>
             <a:r>
               <a:rPr lang="en-US" dirty="0"/>
-              <a:t> function, calling it, and closing the library.</a:t>
+              <a:t>.</a:t>
+            </a:r>
+          </a:p>
+          <a:p>
+            <a:pPr marL="171450" indent="-171450">
+              <a:buFont typeface="Arial" panose="020B0604020202020204" pitchFamily="34" charset="0"/>
+              <a:buChar char="•"/>
+            </a:pPr>
+            <a:r>
+              <a:rPr lang="en-US" sz="1200" kern="1200" dirty="0">
+                <a:solidFill>
+                  <a:schemeClr val="tx1"/>
+                </a:solidFill>
+                <a:latin typeface="+mn-lt"/>
+                <a:ea typeface="+mn-ea"/>
+                <a:cs typeface="+mn-cs"/>
+              </a:rPr>
+              <a:t>-L.</a:t>
+            </a:r>
+            <a:r>
+              <a:rPr lang="en-US" dirty="0"/>
+              <a:t>: Look in the current directory for libraries.</a:t>
+            </a:r>
+          </a:p>
+          <a:p>
+            <a:pPr marL="171450" indent="-171450">
+              <a:buFont typeface="Arial" panose="020B0604020202020204" pitchFamily="34" charset="0"/>
+              <a:buChar char="•"/>
+            </a:pPr>
+            <a:r>
+              <a:rPr lang="en-US" sz="1200" kern="1200" dirty="0">
+                <a:solidFill>
+                  <a:schemeClr val="tx1"/>
+                </a:solidFill>
+                <a:latin typeface="+mn-lt"/>
+                <a:ea typeface="+mn-ea"/>
+                <a:cs typeface="+mn-cs"/>
+              </a:rPr>
+              <a:t>-</a:t>
+            </a:r>
+            <a:r>
+              <a:rPr lang="en-US" sz="1200" kern="1200" dirty="0" err="1">
+                <a:solidFill>
+                  <a:schemeClr val="tx1"/>
+                </a:solidFill>
+                <a:latin typeface="+mn-lt"/>
+                <a:ea typeface="+mn-ea"/>
+                <a:cs typeface="+mn-cs"/>
+              </a:rPr>
+              <a:t>lmath</a:t>
+            </a:r>
+            <a:r>
+              <a:rPr lang="en-US" dirty="0"/>
+              <a:t>: Link against </a:t>
+            </a:r>
+            <a:r>
+              <a:rPr lang="en-US" sz="1200" kern="1200" dirty="0">
+                <a:solidFill>
+                  <a:schemeClr val="tx1"/>
+                </a:solidFill>
+                <a:latin typeface="+mn-lt"/>
+                <a:ea typeface="+mn-ea"/>
+                <a:cs typeface="+mn-cs"/>
+              </a:rPr>
+              <a:t>libmath.so</a:t>
+            </a:r>
+            <a:r>
+              <a:rPr lang="en-US" dirty="0"/>
+              <a:t> (the </a:t>
+            </a:r>
+            <a:r>
+              <a:rPr lang="en-US" sz="1200" kern="1200" dirty="0">
+                <a:solidFill>
+                  <a:schemeClr val="tx1"/>
+                </a:solidFill>
+                <a:latin typeface="+mn-lt"/>
+                <a:ea typeface="+mn-ea"/>
+                <a:cs typeface="+mn-cs"/>
+              </a:rPr>
+              <a:t>lib</a:t>
+            </a:r>
+            <a:r>
+              <a:rPr lang="en-US" dirty="0"/>
+              <a:t> prefix and </a:t>
+            </a:r>
+            <a:r>
+              <a:rPr lang="en-US" sz="1200" kern="1200" dirty="0">
+                <a:solidFill>
+                  <a:schemeClr val="tx1"/>
+                </a:solidFill>
+                <a:latin typeface="+mn-lt"/>
+                <a:ea typeface="+mn-ea"/>
+                <a:cs typeface="+mn-cs"/>
+              </a:rPr>
+              <a:t>.so</a:t>
+            </a:r>
+            <a:r>
+              <a:rPr lang="en-US" dirty="0"/>
+              <a:t> suffix are assumed).</a:t>
+            </a:r>
+          </a:p>
+          <a:p>
+            <a:endParaRPr lang="en-US" dirty="0"/>
+          </a:p>
+        </p:txBody>
+      </p:sp>
+      <p:sp>
+        <p:nvSpPr>
+          <p:cNvPr id="4" name="Slide Number Placeholder 3"/>
+          <p:cNvSpPr>
+            <a:spLocks noGrp="1"/>
+          </p:cNvSpPr>
+          <p:nvPr>
+            <p:ph type="sldNum" sz="quarter" idx="5"/>
+          </p:nvPr>
+        </p:nvSpPr>
+        <p:spPr/>
+        <p:txBody>
+          <a:bodyPr/>
+          <a:lstStyle/>
+          <a:p>
+            <a:fld id="{85A168DF-9E89-434C-8420-43D1583ED296}" type="slidenum">
+              <a:rPr lang="en-US" smtClean="0"/>
+              <a:t>20</a:t>
+            </a:fld>
+            <a:endParaRPr lang="en-US"/>
+          </a:p>
+        </p:txBody>
+      </p:sp>
+    </p:spTree>
+    <p:extLst>
+      <p:ext uri="{BB962C8B-B14F-4D97-AF65-F5344CB8AC3E}">
+        <p14:creationId xmlns:p14="http://schemas.microsoft.com/office/powerpoint/2010/main" val="814308340"/>
+      </p:ext>
+    </p:extLst>
+  </p:cSld>
+  <p:clrMapOvr>
+    <a:masterClrMapping/>
+  </p:clrMapOvr>
+</p:notes>
+</file>
+
+<file path=ppt/notesSlides/notesSlide21.xml><?xml version="1.0" encoding="utf-8"?>
+<p:notes xmlns:a="http://schemas.openxmlformats.org/drawingml/2006/main" xmlns:r="http://schemas.openxmlformats.org/officeDocument/2006/relationships" xmlns:p="http://schemas.openxmlformats.org/presentationml/2006/main">
+  <p:cSld>
+    <p:spTree>
+      <p:nvGrpSpPr>
+        <p:cNvPr id="1" name=""/>
+        <p:cNvGrpSpPr/>
+        <p:nvPr/>
+      </p:nvGrpSpPr>
+      <p:grpSpPr>
+        <a:xfrm>
+          <a:off x="0" y="0"/>
+          <a:ext cx="0" cy="0"/>
+          <a:chOff x="0" y="0"/>
+          <a:chExt cx="0" cy="0"/>
+        </a:xfrm>
+      </p:grpSpPr>
+      <p:sp>
+        <p:nvSpPr>
+          <p:cNvPr id="2" name="Slide Image Placeholder 1"/>
+          <p:cNvSpPr>
+            <a:spLocks noGrp="1" noRot="1" noChangeAspect="1"/>
+          </p:cNvSpPr>
+          <p:nvPr>
+            <p:ph type="sldImg"/>
+          </p:nvPr>
+        </p:nvSpPr>
+        <p:spPr/>
+      </p:sp>
+      <p:sp>
+        <p:nvSpPr>
+          <p:cNvPr id="3" name="Notes Placeholder 2"/>
+          <p:cNvSpPr>
+            <a:spLocks noGrp="1"/>
+          </p:cNvSpPr>
+          <p:nvPr>
+            <p:ph type="body" idx="1"/>
+          </p:nvPr>
+        </p:nvSpPr>
+        <p:spPr/>
+        <p:txBody>
+          <a:bodyPr/>
+          <a:lstStyle/>
+          <a:p>
+            <a:r>
+              <a:rPr lang="en-US" sz="1200" b="1" kern="1200" dirty="0" err="1">
+                <a:solidFill>
+                  <a:schemeClr val="tx1"/>
+                </a:solidFill>
+                <a:latin typeface="+mn-lt"/>
+                <a:ea typeface="+mn-ea"/>
+                <a:cs typeface="+mn-cs"/>
+              </a:rPr>
+              <a:t>dlopen</a:t>
+            </a:r>
+            <a:r>
+              <a:rPr lang="en-US" sz="1200" b="1" kern="1200" dirty="0">
+                <a:solidFill>
+                  <a:schemeClr val="tx1"/>
+                </a:solidFill>
+                <a:latin typeface="+mn-lt"/>
+                <a:ea typeface="+mn-ea"/>
+                <a:cs typeface="+mn-cs"/>
+              </a:rPr>
+              <a:t>()</a:t>
+            </a:r>
+            <a:r>
+              <a:rPr lang="en-US" dirty="0"/>
+              <a:t>: </a:t>
+            </a:r>
+          </a:p>
+          <a:p>
+            <a:r>
+              <a:rPr lang="en-US" dirty="0"/>
+              <a:t>The function used to load a library. It takes a path to a </a:t>
+            </a:r>
+            <a:r>
+              <a:rPr lang="en-US" sz="1200" kern="1200" dirty="0">
+                <a:solidFill>
+                  <a:schemeClr val="tx1"/>
+                </a:solidFill>
+                <a:latin typeface="+mn-lt"/>
+                <a:ea typeface="+mn-ea"/>
+                <a:cs typeface="+mn-cs"/>
+              </a:rPr>
+              <a:t>.so</a:t>
+            </a:r>
+            <a:r>
+              <a:rPr lang="en-US" dirty="0"/>
+              <a:t> file and returns a "handle" (a pointer) to that library.</a:t>
+            </a:r>
+          </a:p>
+          <a:p>
+            <a:endParaRPr lang="en-US" dirty="0"/>
+          </a:p>
+          <a:p>
+            <a:r>
+              <a:rPr lang="en-US" sz="1200" b="1" kern="1200" dirty="0" err="1">
+                <a:solidFill>
+                  <a:schemeClr val="tx1"/>
+                </a:solidFill>
+                <a:latin typeface="+mn-lt"/>
+                <a:ea typeface="+mn-ea"/>
+                <a:cs typeface="+mn-cs"/>
+              </a:rPr>
+              <a:t>dlsym</a:t>
+            </a:r>
+            <a:r>
+              <a:rPr lang="en-US" sz="1200" b="1" kern="1200" dirty="0">
+                <a:solidFill>
+                  <a:schemeClr val="tx1"/>
+                </a:solidFill>
+                <a:latin typeface="+mn-lt"/>
+                <a:ea typeface="+mn-ea"/>
+                <a:cs typeface="+mn-cs"/>
+              </a:rPr>
+              <a:t>()</a:t>
+            </a:r>
+            <a:r>
+              <a:rPr lang="en-US" dirty="0"/>
+              <a:t>: </a:t>
+            </a:r>
+          </a:p>
+          <a:p>
+            <a:r>
+              <a:rPr lang="en-US" dirty="0"/>
+              <a:t>The function used to find a specific symbol (like a function name) inside the loaded library. It returns a function pointer that your code can call.</a:t>
+            </a:r>
+          </a:p>
+          <a:p>
+            <a:endParaRPr lang="en-US" dirty="0"/>
+          </a:p>
+          <a:p>
+            <a:r>
+              <a:rPr lang="en-US" sz="1200" b="1" kern="1200" dirty="0" err="1">
+                <a:solidFill>
+                  <a:schemeClr val="tx1"/>
+                </a:solidFill>
+                <a:latin typeface="+mn-lt"/>
+                <a:ea typeface="+mn-ea"/>
+                <a:cs typeface="+mn-cs"/>
+              </a:rPr>
+              <a:t>dlerror</a:t>
+            </a:r>
+            <a:r>
+              <a:rPr lang="en-US" sz="1200" b="1" kern="1200" dirty="0">
+                <a:solidFill>
+                  <a:schemeClr val="tx1"/>
+                </a:solidFill>
+                <a:latin typeface="+mn-lt"/>
+                <a:ea typeface="+mn-ea"/>
+                <a:cs typeface="+mn-cs"/>
+              </a:rPr>
+              <a:t>()</a:t>
+            </a:r>
+            <a:r>
+              <a:rPr lang="en-US" b="1" dirty="0"/>
+              <a:t> and </a:t>
+            </a:r>
+            <a:r>
+              <a:rPr lang="en-US" sz="1200" b="1" kern="1200" dirty="0" err="1">
+                <a:solidFill>
+                  <a:schemeClr val="tx1"/>
+                </a:solidFill>
+                <a:latin typeface="+mn-lt"/>
+                <a:ea typeface="+mn-ea"/>
+                <a:cs typeface="+mn-cs"/>
+              </a:rPr>
+              <a:t>dlclose</a:t>
+            </a:r>
+            <a:r>
+              <a:rPr lang="en-US" sz="1200" b="1" kern="1200" dirty="0">
+                <a:solidFill>
+                  <a:schemeClr val="tx1"/>
+                </a:solidFill>
+                <a:latin typeface="+mn-lt"/>
+                <a:ea typeface="+mn-ea"/>
+                <a:cs typeface="+mn-cs"/>
+              </a:rPr>
+              <a:t>()</a:t>
+            </a:r>
+            <a:r>
+              <a:rPr lang="en-US" dirty="0"/>
+              <a:t>: </a:t>
+            </a:r>
+          </a:p>
+          <a:p>
+            <a:r>
+              <a:rPr lang="en-US" sz="1200" kern="1200" dirty="0" err="1">
+                <a:solidFill>
+                  <a:schemeClr val="tx1"/>
+                </a:solidFill>
+                <a:latin typeface="+mn-lt"/>
+                <a:ea typeface="+mn-ea"/>
+                <a:cs typeface="+mn-cs"/>
+              </a:rPr>
+              <a:t>dlerror</a:t>
+            </a:r>
+            <a:r>
+              <a:rPr lang="en-US" sz="1200" kern="1200" dirty="0">
+                <a:solidFill>
+                  <a:schemeClr val="tx1"/>
+                </a:solidFill>
+                <a:latin typeface="+mn-lt"/>
+                <a:ea typeface="+mn-ea"/>
+                <a:cs typeface="+mn-cs"/>
+              </a:rPr>
+              <a:t>()</a:t>
+            </a:r>
+            <a:r>
+              <a:rPr lang="en-US" dirty="0"/>
+              <a:t> provides a human-readable string explaining why a load failed; </a:t>
+            </a:r>
+          </a:p>
+          <a:p>
+            <a:r>
+              <a:rPr lang="en-US" sz="1200" kern="1200" dirty="0" err="1">
+                <a:solidFill>
+                  <a:schemeClr val="tx1"/>
+                </a:solidFill>
+                <a:latin typeface="+mn-lt"/>
+                <a:ea typeface="+mn-ea"/>
+                <a:cs typeface="+mn-cs"/>
+              </a:rPr>
+              <a:t>dlclose</a:t>
+            </a:r>
+            <a:r>
+              <a:rPr lang="en-US" sz="1200" kern="1200" dirty="0">
+                <a:solidFill>
+                  <a:schemeClr val="tx1"/>
+                </a:solidFill>
+                <a:latin typeface="+mn-lt"/>
+                <a:ea typeface="+mn-ea"/>
+                <a:cs typeface="+mn-cs"/>
+              </a:rPr>
+              <a:t>()</a:t>
+            </a:r>
+            <a:r>
+              <a:rPr lang="en-US" dirty="0"/>
+              <a:t> unloads the library to free up memory.</a:t>
             </a:r>
           </a:p>
           <a:p>
@@ -2497,6 +2530,194 @@
             <a:r>
               <a:rPr lang="en-US" dirty="0"/>
               <a:t> to use these functions.</a:t>
+            </a:r>
+          </a:p>
+          <a:p>
+            <a:pPr marL="0" marR="0" lvl="0" indent="0" algn="l" defTabSz="914400" rtl="0" eaLnBrk="1" fontAlgn="auto" latinLnBrk="0" hangingPunct="1">
+              <a:lnSpc>
+                <a:spcPct val="100000"/>
+              </a:lnSpc>
+              <a:spcBef>
+                <a:spcPts val="0"/>
+              </a:spcBef>
+              <a:spcAft>
+                <a:spcPts val="0"/>
+              </a:spcAft>
+              <a:buClrTx/>
+              <a:buSzTx/>
+              <a:buFontTx/>
+              <a:buNone/>
+              <a:tabLst/>
+              <a:defRPr/>
+            </a:pPr>
+            <a:endParaRPr lang="en-US" u="sng" dirty="0"/>
+          </a:p>
+          <a:p>
+            <a:pPr marL="0" marR="0" lvl="0" indent="0" algn="l" defTabSz="914400" rtl="0" eaLnBrk="1" fontAlgn="auto" latinLnBrk="0" hangingPunct="1">
+              <a:lnSpc>
+                <a:spcPct val="100000"/>
+              </a:lnSpc>
+              <a:spcBef>
+                <a:spcPts val="0"/>
+              </a:spcBef>
+              <a:spcAft>
+                <a:spcPts val="0"/>
+              </a:spcAft>
+              <a:buClrTx/>
+              <a:buSzTx/>
+              <a:buFontTx/>
+              <a:buNone/>
+              <a:tabLst/>
+              <a:defRPr/>
+            </a:pPr>
+            <a:r>
+              <a:rPr lang="en-US" b="1" u="sng" dirty="0"/>
+              <a:t>See example:</a:t>
+            </a:r>
+            <a:br>
+              <a:rPr lang="en-US" b="1" u="sng" dirty="0"/>
+            </a:br>
+            <a:r>
+              <a:rPr lang="en-US" dirty="0"/>
+              <a:t>Manual Runtime Link directory</a:t>
+            </a:r>
+          </a:p>
+          <a:p>
+            <a:endParaRPr lang="en-US" dirty="0"/>
+          </a:p>
+        </p:txBody>
+      </p:sp>
+      <p:sp>
+        <p:nvSpPr>
+          <p:cNvPr id="4" name="Slide Number Placeholder 3"/>
+          <p:cNvSpPr>
+            <a:spLocks noGrp="1"/>
+          </p:cNvSpPr>
+          <p:nvPr>
+            <p:ph type="sldNum" sz="quarter" idx="5"/>
+          </p:nvPr>
+        </p:nvSpPr>
+        <p:spPr/>
+        <p:txBody>
+          <a:bodyPr/>
+          <a:lstStyle/>
+          <a:p>
+            <a:fld id="{85A168DF-9E89-434C-8420-43D1583ED296}" type="slidenum">
+              <a:rPr lang="en-US" smtClean="0"/>
+              <a:t>23</a:t>
+            </a:fld>
+            <a:endParaRPr lang="en-US"/>
+          </a:p>
+        </p:txBody>
+      </p:sp>
+    </p:spTree>
+    <p:extLst>
+      <p:ext uri="{BB962C8B-B14F-4D97-AF65-F5344CB8AC3E}">
+        <p14:creationId xmlns:p14="http://schemas.microsoft.com/office/powerpoint/2010/main" val="1616791146"/>
+      </p:ext>
+    </p:extLst>
+  </p:cSld>
+  <p:clrMapOvr>
+    <a:masterClrMapping/>
+  </p:clrMapOvr>
+</p:notes>
+</file>
+
+<file path=ppt/notesSlides/notesSlide22.xml><?xml version="1.0" encoding="utf-8"?>
+<p:notes xmlns:a="http://schemas.openxmlformats.org/drawingml/2006/main" xmlns:r="http://schemas.openxmlformats.org/officeDocument/2006/relationships" xmlns:p="http://schemas.openxmlformats.org/presentationml/2006/main">
+  <p:cSld>
+    <p:spTree>
+      <p:nvGrpSpPr>
+        <p:cNvPr id="1" name=""/>
+        <p:cNvGrpSpPr/>
+        <p:nvPr/>
+      </p:nvGrpSpPr>
+      <p:grpSpPr>
+        <a:xfrm>
+          <a:off x="0" y="0"/>
+          <a:ext cx="0" cy="0"/>
+          <a:chOff x="0" y="0"/>
+          <a:chExt cx="0" cy="0"/>
+        </a:xfrm>
+      </p:grpSpPr>
+      <p:sp>
+        <p:nvSpPr>
+          <p:cNvPr id="2" name="Slide Image Placeholder 1"/>
+          <p:cNvSpPr>
+            <a:spLocks noGrp="1" noRot="1" noChangeAspect="1"/>
+          </p:cNvSpPr>
+          <p:nvPr>
+            <p:ph type="sldImg"/>
+          </p:nvPr>
+        </p:nvSpPr>
+        <p:spPr/>
+      </p:sp>
+      <p:sp>
+        <p:nvSpPr>
+          <p:cNvPr id="3" name="Notes Placeholder 2"/>
+          <p:cNvSpPr>
+            <a:spLocks noGrp="1"/>
+          </p:cNvSpPr>
+          <p:nvPr>
+            <p:ph type="body" idx="1"/>
+          </p:nvPr>
+        </p:nvSpPr>
+        <p:spPr/>
+        <p:txBody>
+          <a:bodyPr/>
+          <a:lstStyle/>
+          <a:p>
+            <a:r>
+              <a:rPr lang="en-US" b="1" dirty="0"/>
+              <a:t>Example Code (</a:t>
+            </a:r>
+            <a:r>
+              <a:rPr lang="en-US" b="1" dirty="0" err="1"/>
+              <a:t>dlopen</a:t>
+            </a:r>
+            <a:r>
+              <a:rPr lang="en-US" b="1" dirty="0"/>
+              <a:t>)</a:t>
+            </a:r>
+            <a:r>
+              <a:rPr lang="en-US" dirty="0"/>
+              <a:t>: </a:t>
+            </a:r>
+          </a:p>
+          <a:p>
+            <a:r>
+              <a:rPr lang="en-US" dirty="0"/>
+              <a:t>A code snippet showing the full workflow: loading </a:t>
+            </a:r>
+            <a:r>
+              <a:rPr lang="en-US" sz="1200" kern="1200" dirty="0">
+                <a:solidFill>
+                  <a:schemeClr val="tx1"/>
+                </a:solidFill>
+                <a:latin typeface="+mn-lt"/>
+                <a:ea typeface="+mn-ea"/>
+                <a:cs typeface="+mn-cs"/>
+              </a:rPr>
+              <a:t>libmath.so</a:t>
+            </a:r>
+            <a:r>
+              <a:rPr lang="en-US" dirty="0"/>
+              <a:t>, finding the </a:t>
+            </a:r>
+            <a:r>
+              <a:rPr lang="en-US" sz="1200" kern="1200" dirty="0">
+                <a:solidFill>
+                  <a:schemeClr val="tx1"/>
+                </a:solidFill>
+                <a:latin typeface="+mn-lt"/>
+                <a:ea typeface="+mn-ea"/>
+                <a:cs typeface="+mn-cs"/>
+              </a:rPr>
+              <a:t>add</a:t>
+            </a:r>
+            <a:r>
+              <a:rPr lang="en-US" dirty="0"/>
+              <a:t> function, calling it, and closing the library.</a:t>
             </a:r>
           </a:p>
           <a:p>
@@ -2557,7 +2778,7 @@
 </p:notes>
 </file>
 
-<file path=ppt/notesSlides/notesSlide21.xml><?xml version="1.0" encoding="utf-8"?>
+<file path=ppt/notesSlides/notesSlide23.xml><?xml version="1.0" encoding="utf-8"?>
 <p:notes xmlns:a="http://schemas.openxmlformats.org/drawingml/2006/main" xmlns:r="http://schemas.openxmlformats.org/officeDocument/2006/relationships" xmlns:p="http://schemas.openxmlformats.org/presentationml/2006/main">
   <p:cSld>
     <p:spTree>
@@ -2729,7 +2950,7 @@
 </p:notes>
 </file>
 
-<file path=ppt/notesSlides/notesSlide22.xml><?xml version="1.0" encoding="utf-8"?>
+<file path=ppt/notesSlides/notesSlide24.xml><?xml version="1.0" encoding="utf-8"?>
 <p:notes xmlns:a="http://schemas.openxmlformats.org/drawingml/2006/main" xmlns:r="http://schemas.openxmlformats.org/officeDocument/2006/relationships" xmlns:p="http://schemas.openxmlformats.org/presentationml/2006/main">
   <p:cSld>
     <p:spTree>
@@ -4622,7 +4843,7 @@
           <a:p>
             <a:fld id="{1D8BD707-D9CF-40AE-B4C6-C98DA3205C09}" type="datetimeFigureOut">
               <a:rPr lang="en-US"/>
-              <a:t>2/15/2026</a:t>
+              <a:t>2/16/2026</a:t>
             </a:fld>
             <a:endParaRPr lang="en-US"/>
           </a:p>
@@ -4799,7 +5020,7 @@
           <a:p>
             <a:fld id="{1D8BD707-D9CF-40AE-B4C6-C98DA3205C09}" type="datetimeFigureOut">
               <a:rPr lang="en-US"/>
-              <a:t>2/15/2026</a:t>
+              <a:t>2/16/2026</a:t>
             </a:fld>
             <a:endParaRPr lang="en-US"/>
           </a:p>
@@ -5017,7 +5238,7 @@
           <a:p>
             <a:fld id="{1D8BD707-D9CF-40AE-B4C6-C98DA3205C09}" type="datetimeFigureOut">
               <a:rPr lang="en-US"/>
-              <a:t>2/15/2026</a:t>
+              <a:t>2/16/2026</a:t>
             </a:fld>
             <a:endParaRPr lang="en-US"/>
           </a:p>
@@ -5165,7 +5386,7 @@
           <a:p>
             <a:fld id="{1D8BD707-D9CF-40AE-B4C6-C98DA3205C09}" type="datetimeFigureOut">
               <a:rPr lang="en-US"/>
-              <a:t>2/15/2026</a:t>
+              <a:t>2/16/2026</a:t>
             </a:fld>
             <a:endParaRPr lang="en-US"/>
           </a:p>
@@ -5284,7 +5505,7 @@
           <a:p>
             <a:fld id="{1D8BD707-D9CF-40AE-B4C6-C98DA3205C09}" type="datetimeFigureOut">
               <a:rPr lang="en-US"/>
-              <a:t>2/15/2026</a:t>
+              <a:t>2/16/2026</a:t>
             </a:fld>
             <a:endParaRPr lang="en-US"/>
           </a:p>
@@ -5531,7 +5752,7 @@
           <a:p>
             <a:fld id="{1D8BD707-D9CF-40AE-B4C6-C98DA3205C09}" type="datetimeFigureOut">
               <a:rPr lang="en-US"/>
-              <a:t>2/15/2026</a:t>
+              <a:t>2/16/2026</a:t>
             </a:fld>
             <a:endParaRPr lang="en-US"/>
           </a:p>
@@ -7145,6 +7366,12 @@
               </a:rPr>
               <a:t> </a:t>
             </a:r>
+            <a:br>
+              <a:rPr lang="en-US" sz="1800" spc="-30" dirty="0">
+                <a:latin typeface="Arial MT"/>
+                <a:cs typeface="Arial MT"/>
+              </a:rPr>
+            </a:br>
             <a:r>
               <a:rPr sz="1800" spc="-25" dirty="0">
                 <a:latin typeface="Arial MT"/>
@@ -8101,7 +8328,7 @@
             <p:nvPr/>
           </p:nvPicPr>
           <p:blipFill>
-            <a:blip r:embed="rId2" cstate="print"/>
+            <a:blip r:embed="rId3" cstate="print"/>
             <a:stretch>
               <a:fillRect/>
             </a:stretch>
@@ -8478,7 +8705,7 @@
           <p:nvPr/>
         </p:nvPicPr>
         <p:blipFill>
-          <a:blip r:embed="rId2" cstate="print"/>
+          <a:blip r:embed="rId3" cstate="print"/>
           <a:stretch>
             <a:fillRect/>
           </a:stretch>
@@ -11712,7 +11939,7 @@
               </a:rPr>
               <a:t>mathlib.c</a:t>
             </a:r>
-            <a:endParaRPr sz="2000">
+            <a:endParaRPr sz="2000" dirty="0">
               <a:latin typeface="Arial"/>
               <a:cs typeface="Arial"/>
             </a:endParaRPr>
@@ -26993,6 +27220,36 @@
               </a:spcBef>
             </a:pPr>
             <a:r>
+              <a:rPr sz="2000" b="1" dirty="0" err="1">
+                <a:solidFill>
+                  <a:srgbClr val="A00C30"/>
+                </a:solidFill>
+                <a:latin typeface="Arial"/>
+                <a:cs typeface="Arial"/>
+              </a:rPr>
+              <a:t>gcc</a:t>
+            </a:r>
+            <a:r>
+              <a:rPr sz="2000" b="1" spc="-30" dirty="0">
+                <a:solidFill>
+                  <a:srgbClr val="A00C30"/>
+                </a:solidFill>
+                <a:latin typeface="Arial"/>
+                <a:cs typeface="Arial"/>
+              </a:rPr>
+              <a:t> </a:t>
+            </a:r>
+            <a:r>
+              <a:rPr sz="2000" b="1" spc="-10" dirty="0">
+                <a:solidFill>
+                  <a:srgbClr val="A00C30"/>
+                </a:solidFill>
+                <a:latin typeface="Arial"/>
+                <a:cs typeface="Arial"/>
+              </a:rPr>
+              <a:t>-</a:t>
+            </a:r>
+            <a:r>
               <a:rPr sz="2000" b="1" dirty="0">
                 <a:solidFill>
                   <a:srgbClr val="A00C30"/>
@@ -27000,7 +27257,7 @@
                 <a:latin typeface="Arial"/>
                 <a:cs typeface="Arial"/>
               </a:rPr>
-              <a:t>gcc</a:t>
+              <a:t>shared</a:t>
             </a:r>
             <a:r>
               <a:rPr sz="2000" b="1" spc="-30" dirty="0">
@@ -27023,6 +27280,36 @@
               <a:t>-</a:t>
             </a:r>
             <a:r>
+              <a:rPr sz="2000" b="1" dirty="0" err="1">
+                <a:solidFill>
+                  <a:srgbClr val="A00C30"/>
+                </a:solidFill>
+                <a:latin typeface="Arial"/>
+                <a:cs typeface="Arial"/>
+              </a:rPr>
+              <a:t>fPIC</a:t>
+            </a:r>
+            <a:r>
+              <a:rPr sz="2000" b="1" spc="-25" dirty="0">
+                <a:solidFill>
+                  <a:srgbClr val="A00C30"/>
+                </a:solidFill>
+                <a:latin typeface="Arial"/>
+                <a:cs typeface="Arial"/>
+              </a:rPr>
+              <a:t> </a:t>
+            </a:r>
+            <a:r>
+              <a:rPr sz="2000" b="1" spc="-10" dirty="0">
+                <a:solidFill>
+                  <a:srgbClr val="A00C30"/>
+                </a:solidFill>
+                <a:latin typeface="Arial"/>
+                <a:cs typeface="Arial"/>
+              </a:rPr>
+              <a:t>-</a:t>
+            </a:r>
+            <a:r>
               <a:rPr sz="2000" b="1" dirty="0">
                 <a:solidFill>
                   <a:srgbClr val="A00C30"/>
@@ -27030,7 +27317,7 @@
                 <a:latin typeface="Arial"/>
                 <a:cs typeface="Arial"/>
               </a:rPr>
-              <a:t>shared</a:t>
+              <a:t>o</a:t>
             </a:r>
             <a:r>
               <a:rPr sz="2000" b="1" spc="-30" dirty="0">
@@ -27043,96 +27330,36 @@
               <a:t> </a:t>
             </a:r>
             <a:r>
-              <a:rPr sz="2000" b="1" spc="-10" dirty="0">
+              <a:rPr sz="2000" b="1" dirty="0">
                 <a:solidFill>
                   <a:srgbClr val="A00C30"/>
                 </a:solidFill>
                 <a:latin typeface="Arial"/>
                 <a:cs typeface="Arial"/>
               </a:rPr>
-              <a:t>-</a:t>
-            </a:r>
-            <a:r>
-              <a:rPr sz="2000" b="1" dirty="0">
+              <a:t>libmath.so</a:t>
+            </a:r>
+            <a:r>
+              <a:rPr sz="2000" b="1" spc="-25" dirty="0">
                 <a:solidFill>
                   <a:srgbClr val="A00C30"/>
                 </a:solidFill>
                 <a:latin typeface="Arial"/>
                 <a:cs typeface="Arial"/>
               </a:rPr>
-              <a:t>fPIC</a:t>
-            </a:r>
-            <a:r>
-              <a:rPr sz="2000" b="1" spc="-25" dirty="0">
+              <a:t> </a:t>
+            </a:r>
+            <a:r>
+              <a:rPr sz="2000" b="1" spc="-10" dirty="0" err="1">
                 <a:solidFill>
                   <a:srgbClr val="A00C30"/>
                 </a:solidFill>
                 <a:latin typeface="Arial"/>
                 <a:cs typeface="Arial"/>
               </a:rPr>
-              <a:t> </a:t>
-            </a:r>
-            <a:r>
-              <a:rPr sz="2000" b="1" spc="-10" dirty="0">
-                <a:solidFill>
-                  <a:srgbClr val="A00C30"/>
-                </a:solidFill>
-                <a:latin typeface="Arial"/>
-                <a:cs typeface="Arial"/>
-              </a:rPr>
-              <a:t>-</a:t>
-            </a:r>
-            <a:r>
-              <a:rPr sz="2000" b="1" dirty="0">
-                <a:solidFill>
-                  <a:srgbClr val="A00C30"/>
-                </a:solidFill>
-                <a:latin typeface="Arial"/>
-                <a:cs typeface="Arial"/>
-              </a:rPr>
-              <a:t>o</a:t>
-            </a:r>
-            <a:r>
-              <a:rPr sz="2000" b="1" spc="-30" dirty="0">
-                <a:solidFill>
-                  <a:srgbClr val="A00C30"/>
-                </a:solidFill>
-                <a:latin typeface="Arial"/>
-                <a:cs typeface="Arial"/>
-              </a:rPr>
-              <a:t> </a:t>
-            </a:r>
-            <a:r>
-              <a:rPr sz="2000" b="1" dirty="0">
-                <a:solidFill>
-                  <a:srgbClr val="A00C30"/>
-                </a:solidFill>
-                <a:latin typeface="Arial"/>
-                <a:cs typeface="Arial"/>
-              </a:rPr>
-              <a:t>libmath.so</a:t>
-            </a:r>
-            <a:r>
-              <a:rPr sz="2000" b="1" spc="-25" dirty="0">
-                <a:solidFill>
-                  <a:srgbClr val="A00C30"/>
-                </a:solidFill>
-                <a:latin typeface="Arial"/>
-                <a:cs typeface="Arial"/>
-              </a:rPr>
-              <a:t> </a:t>
-            </a:r>
-            <a:r>
-              <a:rPr sz="2000" b="1" spc="-10" dirty="0">
-                <a:solidFill>
-                  <a:srgbClr val="A00C30"/>
-                </a:solidFill>
-                <a:latin typeface="Arial"/>
-                <a:cs typeface="Arial"/>
-              </a:rPr>
               <a:t>mathlib.c</a:t>
             </a:r>
-            <a:endParaRPr sz="2000">
+            <a:endParaRPr sz="2000" dirty="0">
               <a:latin typeface="Arial"/>
               <a:cs typeface="Arial"/>
             </a:endParaRPr>
@@ -27305,7 +27532,7 @@
               </a:rPr>
               <a:t>ldl</a:t>
             </a:r>
-            <a:endParaRPr sz="2000">
+            <a:endParaRPr sz="2000" dirty="0">
               <a:latin typeface="Arial"/>
               <a:cs typeface="Arial"/>
             </a:endParaRPr>
@@ -28790,7 +29017,7 @@
               </a:rPr>
               <a:t>libmath_v1.c</a:t>
             </a:r>
-            <a:endParaRPr sz="2000">
+            <a:endParaRPr sz="2000" dirty="0">
               <a:latin typeface="Arial"/>
               <a:cs typeface="Arial"/>
             </a:endParaRPr>
@@ -29116,7 +29343,7 @@
         <p:spPr>
           <a:xfrm>
             <a:off x="471950" y="5353649"/>
-            <a:ext cx="6003925" cy="492759"/>
+            <a:ext cx="6003925" cy="384080"/>
           </a:xfrm>
           <a:prstGeom prst="rect">
             <a:avLst/>
@@ -29271,7 +29498,7 @@
               </a:rPr>
               <a:t>-lmath</a:t>
             </a:r>
-            <a:endParaRPr sz="2000">
+            <a:endParaRPr sz="2000" dirty="0">
               <a:latin typeface="Arial"/>
               <a:cs typeface="Arial"/>
             </a:endParaRPr>
@@ -30073,7 +30300,7 @@
               </a:rPr>
               <a:t>libmath_v2.c</a:t>
             </a:r>
-            <a:endParaRPr sz="2000">
+            <a:endParaRPr sz="2000" dirty="0">
               <a:latin typeface="Arial"/>
               <a:cs typeface="Arial"/>
             </a:endParaRPr>
@@ -30462,7 +30689,7 @@
               </a:rPr>
               <a:t>libmath.so</a:t>
             </a:r>
-            <a:endParaRPr sz="2000">
+            <a:endParaRPr sz="2000" dirty="0">
               <a:latin typeface="Arial"/>
               <a:cs typeface="Arial"/>
             </a:endParaRPr>
@@ -31166,7 +31393,7 @@
               </a:rPr>
               <a:t>libmath.so</a:t>
             </a:r>
-            <a:endParaRPr sz="2000">
+            <a:endParaRPr sz="2000" dirty="0">
               <a:latin typeface="Arial"/>
               <a:cs typeface="Arial"/>
             </a:endParaRPr>
